--- a/templates/ministry-unified.pptx
+++ b/templates/ministry-unified.pptx
@@ -19,6 +19,8 @@
     <p:sldId id="264" r:id="rIdS9"/>
     <p:sldId id="265" r:id="rIdS10"/>
     <p:sldId id="266" r:id="rIdS11"/>
+    <p:sldId id="267" r:id="rIdS12"/>
+    <p:sldId id="268" r:id="rIdS13"/>
   </p:sldIdLst>
   <p:sldSz cx="12192000" cy="6858000"/>
   <p:notesSz cx="6858000" cy="9144000"/>
@@ -10974,6 +10976,226 @@
 </file>
 
 <file path=ppt/slides/slide11.xml><?xml version="1.0" encoding="utf-8"?>
+<p:sld xmlns:a="http://schemas.openxmlformats.org/drawingml/2006/main" xmlns:r="http://schemas.openxmlformats.org/officeDocument/2006/relationships" xmlns:p="http://schemas.openxmlformats.org/presentationml/2006/main">
+  <p:cSld>
+    <p:spTree>
+      <p:nvGrpSpPr>
+        <p:cNvPr id="1" name="">
+          <a:extLst>
+            <a:ext uri="{FF2B5EF4-FFF2-40B4-BE49-F238E27FC236}">
+              <a16:creationId xmlns:a16="http://schemas.microsoft.com/office/drawing/2014/main" id="{F45B04A5-6B77-503A-18CA-5063EAA01F13}"/>
+            </a:ext>
+          </a:extLst>
+        </p:cNvPr>
+        <p:cNvGrpSpPr/>
+        <p:nvPr/>
+      </p:nvGrpSpPr>
+      <p:grpSpPr>
+        <a:xfrm>
+          <a:off x="0" y="0"/>
+          <a:ext cx="0" cy="0"/>
+          <a:chOff x="0" y="0"/>
+          <a:chExt cx="0" cy="0"/>
+        </a:xfrm>
+      </p:grpSpPr>
+      <p:sp>
+        <p:nvSpPr>
+          <p:cNvPr id="2" name="TextBox 1">
+            <a:extLst>
+              <a:ext uri="{FF2B5EF4-FFF2-40B4-BE49-F238E27FC236}">
+                <a16:creationId xmlns:a16="http://schemas.microsoft.com/office/drawing/2014/main" id="{1A4F32FE-2657-2608-B2F5-F6FC9774E2A7}"/>
+              </a:ext>
+            </a:extLst>
+          </p:cNvPr>
+          <p:cNvSpPr txBox="1"/>
+          <p:nvPr/>
+        </p:nvSpPr>
+        <p:spPr>
+          <a:xfrm>
+            <a:off x="731520" y="232324"/>
+            <a:ext cx="10937195" cy="584775"/>
+          </a:xfrm>
+          <a:prstGeom prst="rect">
+            <a:avLst/>
+          </a:prstGeom>
+          <a:noFill/>
+        </p:spPr>
+        <p:txBody>
+          <a:bodyPr wrap="none" rtlCol="0">
+            <a:spAutoFit/>
+          </a:bodyPr>
+          <a:lstStyle/>
+          <a:p>
+            <a:pPr algn="r" rtl="1"/>
+            <a:r>
+              <a:rPr lang="ar-SA" sz="3200" b="1" dirty="0">
+                <a:solidFill>
+                  <a:srgbClr val="D7A562"/>
+                </a:solidFill>
+                <a:latin typeface="Abar Mid" pitchFamily="2" charset="-78"/>
+                <a:ea typeface="Abar Mid" pitchFamily="2" charset="-78"/>
+                <a:cs typeface="Abar Mid" pitchFamily="2" charset="-78"/>
+              </a:rPr>
+              <a:t>{{T}}</a:t>
+            </a:r>
+            <a:endParaRPr lang="en-SA" sz="3200" b="1" dirty="0">
+              <a:solidFill>
+                <a:srgbClr val="D7A562"/>
+              </a:solidFill>
+              <a:latin typeface="Abar Mid" pitchFamily="2" charset="-78"/>
+              <a:ea typeface="Abar Mid" pitchFamily="2" charset="-78"/>
+              <a:cs typeface="Abar Mid" pitchFamily="2" charset="-78"/>
+            </a:endParaRPr>
+          </a:p>
+        </p:txBody>
+      </p:sp>
+      <p:sp>
+        <p:nvSpPr>
+          <p:cNvPr id="990" name="BODY"/>
+          <p:cNvSpPr/>
+          <p:nvPr/>
+        </p:nvSpPr>
+        <p:spPr>
+          <a:xfrm>
+            <a:off x="0" y="0"/>
+            <a:ext cx="1" cy="1"/>
+          </a:xfrm>
+          <a:prstGeom prst="rect">
+            <a:avLst/>
+          </a:prstGeom>
+        </p:spPr>
+        <p:txBody>
+          <a:bodyPr/>
+          <a:lstStyle/>
+          <a:p>
+            <a:endParaRPr lang="ar-SA"/>
+          </a:p>
+        </p:txBody>
+      </p:sp>
+    </p:spTree>
+    <p:extLst>
+      <p:ext uri="{BB962C8B-B14F-4D97-AF65-F5344CB8AC3E}">
+        <p14:creationId xmlns:p14="http://schemas.microsoft.com/office/powerpoint/2010/main" val="3893223897"/>
+      </p:ext>
+    </p:extLst>
+  </p:cSld>
+  <p:clrMapOvr>
+    <a:masterClrMapping/>
+  </p:clrMapOvr>
+</p:sld>
+</file>
+
+<file path=ppt/slides/slide12.xml><?xml version="1.0" encoding="utf-8"?>
+<p:sld xmlns:a="http://schemas.openxmlformats.org/drawingml/2006/main" xmlns:r="http://schemas.openxmlformats.org/officeDocument/2006/relationships" xmlns:p="http://schemas.openxmlformats.org/presentationml/2006/main">
+  <p:cSld>
+    <p:spTree>
+      <p:nvGrpSpPr>
+        <p:cNvPr id="1" name="">
+          <a:extLst>
+            <a:ext uri="{FF2B5EF4-FFF2-40B4-BE49-F238E27FC236}">
+              <a16:creationId xmlns:a16="http://schemas.microsoft.com/office/drawing/2014/main" id="{F45B04A5-6B77-503A-18CA-5063EAA01F13}"/>
+            </a:ext>
+          </a:extLst>
+        </p:cNvPr>
+        <p:cNvGrpSpPr/>
+        <p:nvPr/>
+      </p:nvGrpSpPr>
+      <p:grpSpPr>
+        <a:xfrm>
+          <a:off x="0" y="0"/>
+          <a:ext cx="0" cy="0"/>
+          <a:chOff x="0" y="0"/>
+          <a:chExt cx="0" cy="0"/>
+        </a:xfrm>
+      </p:grpSpPr>
+      <p:sp>
+        <p:nvSpPr>
+          <p:cNvPr id="2" name="TextBox 1">
+            <a:extLst>
+              <a:ext uri="{FF2B5EF4-FFF2-40B4-BE49-F238E27FC236}">
+                <a16:creationId xmlns:a16="http://schemas.microsoft.com/office/drawing/2014/main" id="{1A4F32FE-2657-2608-B2F5-F6FC9774E2A7}"/>
+              </a:ext>
+            </a:extLst>
+          </p:cNvPr>
+          <p:cNvSpPr txBox="1"/>
+          <p:nvPr/>
+        </p:nvSpPr>
+        <p:spPr>
+          <a:xfrm>
+            <a:off x="731520" y="232324"/>
+            <a:ext cx="10937195" cy="584775"/>
+          </a:xfrm>
+          <a:prstGeom prst="rect">
+            <a:avLst/>
+          </a:prstGeom>
+          <a:noFill/>
+        </p:spPr>
+        <p:txBody>
+          <a:bodyPr wrap="none" rtlCol="0">
+            <a:spAutoFit/>
+          </a:bodyPr>
+          <a:lstStyle/>
+          <a:p>
+            <a:pPr algn="r" rtl="1"/>
+            <a:r>
+              <a:rPr lang="ar-SA" sz="3200" b="1" dirty="0">
+                <a:solidFill>
+                  <a:srgbClr val="D7A562"/>
+                </a:solidFill>
+                <a:latin typeface="Abar Mid" pitchFamily="2" charset="-78"/>
+                <a:ea typeface="Abar Mid" pitchFamily="2" charset="-78"/>
+                <a:cs typeface="Abar Mid" pitchFamily="2" charset="-78"/>
+              </a:rPr>
+              <a:t>{{T}}</a:t>
+            </a:r>
+            <a:endParaRPr lang="en-SA" sz="3200" b="1" dirty="0">
+              <a:solidFill>
+                <a:srgbClr val="D7A562"/>
+              </a:solidFill>
+              <a:latin typeface="Abar Mid" pitchFamily="2" charset="-78"/>
+              <a:ea typeface="Abar Mid" pitchFamily="2" charset="-78"/>
+              <a:cs typeface="Abar Mid" pitchFamily="2" charset="-78"/>
+            </a:endParaRPr>
+          </a:p>
+        </p:txBody>
+      </p:sp>
+      <p:sp>
+        <p:nvSpPr>
+          <p:cNvPr id="990" name="BODY"/>
+          <p:cNvSpPr/>
+          <p:nvPr/>
+        </p:nvSpPr>
+        <p:spPr>
+          <a:xfrm>
+            <a:off x="0" y="0"/>
+            <a:ext cx="1" cy="1"/>
+          </a:xfrm>
+          <a:prstGeom prst="rect">
+            <a:avLst/>
+          </a:prstGeom>
+        </p:spPr>
+        <p:txBody>
+          <a:bodyPr/>
+          <a:lstStyle/>
+          <a:p>
+            <a:endParaRPr lang="ar-SA"/>
+          </a:p>
+        </p:txBody>
+      </p:sp>
+    </p:spTree>
+    <p:extLst>
+      <p:ext uri="{BB962C8B-B14F-4D97-AF65-F5344CB8AC3E}">
+        <p14:creationId xmlns:p14="http://schemas.microsoft.com/office/powerpoint/2010/main" val="3893223897"/>
+      </p:ext>
+    </p:extLst>
+  </p:cSld>
+  <p:clrMapOvr>
+    <a:masterClrMapping/>
+  </p:clrMapOvr>
+</p:sld>
+</file>
+
+<file path=ppt/slides/slide13.xml><?xml version="1.0" encoding="utf-8"?>
 <p:sld xmlns:a="http://schemas.openxmlformats.org/drawingml/2006/main" xmlns:r="http://schemas.openxmlformats.org/officeDocument/2006/relationships" xmlns:p="http://schemas.openxmlformats.org/presentationml/2006/main">
   <p:cSld>
     <p:spTree>

--- a/templates/ministry-unified.pptx
+++ b/templates/ministry-unified.pptx
@@ -21,6 +21,7 @@
     <p:sldId id="266" r:id="rIdS11"/>
     <p:sldId id="267" r:id="rIdS12"/>
     <p:sldId id="268" r:id="rIdS13"/>
+    <p:sldId id="269" r:id="rIdS14"/>
   </p:sldIdLst>
   <p:sldSz cx="12192000" cy="6858000"/>
   <p:notesSz cx="6858000" cy="9144000"/>
@@ -11196,6 +11197,116 @@
 </file>
 
 <file path=ppt/slides/slide13.xml><?xml version="1.0" encoding="utf-8"?>
+<p:sld xmlns:a="http://schemas.openxmlformats.org/drawingml/2006/main" xmlns:r="http://schemas.openxmlformats.org/officeDocument/2006/relationships" xmlns:p="http://schemas.openxmlformats.org/presentationml/2006/main">
+  <p:cSld>
+    <p:spTree>
+      <p:nvGrpSpPr>
+        <p:cNvPr id="1" name="">
+          <a:extLst>
+            <a:ext uri="{FF2B5EF4-FFF2-40B4-BE49-F238E27FC236}">
+              <a16:creationId xmlns:a16="http://schemas.microsoft.com/office/drawing/2014/main" id="{F45B04A5-6B77-503A-18CA-5063EAA01F13}"/>
+            </a:ext>
+          </a:extLst>
+        </p:cNvPr>
+        <p:cNvGrpSpPr/>
+        <p:nvPr/>
+      </p:nvGrpSpPr>
+      <p:grpSpPr>
+        <a:xfrm>
+          <a:off x="0" y="0"/>
+          <a:ext cx="0" cy="0"/>
+          <a:chOff x="0" y="0"/>
+          <a:chExt cx="0" cy="0"/>
+        </a:xfrm>
+      </p:grpSpPr>
+      <p:sp>
+        <p:nvSpPr>
+          <p:cNvPr id="2" name="TextBox 1">
+            <a:extLst>
+              <a:ext uri="{FF2B5EF4-FFF2-40B4-BE49-F238E27FC236}">
+                <a16:creationId xmlns:a16="http://schemas.microsoft.com/office/drawing/2014/main" id="{1A4F32FE-2657-2608-B2F5-F6FC9774E2A7}"/>
+              </a:ext>
+            </a:extLst>
+          </p:cNvPr>
+          <p:cNvSpPr txBox="1"/>
+          <p:nvPr/>
+        </p:nvSpPr>
+        <p:spPr>
+          <a:xfrm>
+            <a:off x="731520" y="232324"/>
+            <a:ext cx="10937195" cy="584775"/>
+          </a:xfrm>
+          <a:prstGeom prst="rect">
+            <a:avLst/>
+          </a:prstGeom>
+          <a:noFill/>
+        </p:spPr>
+        <p:txBody>
+          <a:bodyPr wrap="none" rtlCol="0">
+            <a:spAutoFit/>
+          </a:bodyPr>
+          <a:lstStyle/>
+          <a:p>
+            <a:pPr algn="r" rtl="1"/>
+            <a:r>
+              <a:rPr lang="ar-SA" sz="3200" b="1" dirty="0">
+                <a:solidFill>
+                  <a:srgbClr val="D7A562"/>
+                </a:solidFill>
+                <a:latin typeface="Abar Mid" pitchFamily="2" charset="-78"/>
+                <a:ea typeface="Abar Mid" pitchFamily="2" charset="-78"/>
+                <a:cs typeface="Abar Mid" pitchFamily="2" charset="-78"/>
+              </a:rPr>
+              <a:t>{{T}}</a:t>
+            </a:r>
+            <a:endParaRPr lang="en-SA" sz="3200" b="1" dirty="0">
+              <a:solidFill>
+                <a:srgbClr val="D7A562"/>
+              </a:solidFill>
+              <a:latin typeface="Abar Mid" pitchFamily="2" charset="-78"/>
+              <a:ea typeface="Abar Mid" pitchFamily="2" charset="-78"/>
+              <a:cs typeface="Abar Mid" pitchFamily="2" charset="-78"/>
+            </a:endParaRPr>
+          </a:p>
+        </p:txBody>
+      </p:sp>
+      <p:sp>
+        <p:nvSpPr>
+          <p:cNvPr id="990" name="BODY"/>
+          <p:cNvSpPr/>
+          <p:nvPr/>
+        </p:nvSpPr>
+        <p:spPr>
+          <a:xfrm>
+            <a:off x="0" y="0"/>
+            <a:ext cx="1" cy="1"/>
+          </a:xfrm>
+          <a:prstGeom prst="rect">
+            <a:avLst/>
+          </a:prstGeom>
+        </p:spPr>
+        <p:txBody>
+          <a:bodyPr/>
+          <a:lstStyle/>
+          <a:p>
+            <a:endParaRPr lang="ar-SA"/>
+          </a:p>
+        </p:txBody>
+      </p:sp>
+    </p:spTree>
+    <p:extLst>
+      <p:ext uri="{BB962C8B-B14F-4D97-AF65-F5344CB8AC3E}">
+        <p14:creationId xmlns:p14="http://schemas.microsoft.com/office/powerpoint/2010/main" val="3893223897"/>
+      </p:ext>
+    </p:extLst>
+  </p:cSld>
+  <p:clrMapOvr>
+    <a:masterClrMapping/>
+  </p:clrMapOvr>
+</p:sld>
+</file>
+
+<file path=ppt/slides/slide14.xml><?xml version="1.0" encoding="utf-8"?>
 <p:sld xmlns:a="http://schemas.openxmlformats.org/drawingml/2006/main" xmlns:r="http://schemas.openxmlformats.org/officeDocument/2006/relationships" xmlns:p="http://schemas.openxmlformats.org/presentationml/2006/main">
   <p:cSld>
     <p:spTree>
